--- a/deliverables/deck/Deck.pptx
+++ b/deliverables/deck/Deck.pptx
@@ -23,33 +23,6 @@
     <p:sldId id="271" r:id="rId17"/>
     <p:sldId id="272" r:id="rId18"/>
   </p:sldIdLst>
-  <p:custShowLst>
-    <p:custShow name="Pre-Event Loop" id="0">
-      <p:sldLst>
-        <p:sld r:id="rId2"/>
-        <p:sld r:id="rId3"/>
-        <p:sld r:id="rId4"/>
-        <p:sld r:id="rId5"/>
-        <p:sld r:id="rId6"/>
-      </p:sldLst>
-    </p:custShow>
-    <p:custShow name="Event" id="1">
-      <p:sldLst>
-        <p:sld r:id="rId7"/>
-        <p:sld r:id="rId8"/>
-        <p:sld r:id="rId9"/>
-        <p:sld r:id="rId10"/>
-        <p:sld r:id="rId11"/>
-        <p:sld r:id="rId12"/>
-        <p:sld r:id="rId13"/>
-        <p:sld r:id="rId14"/>
-        <p:sld r:id="rId15"/>
-        <p:sld r:id="rId16"/>
-        <p:sld r:id="rId17"/>
-        <p:sld r:id="rId18"/>
-      </p:sldLst>
-    </p:custShow>
-  </p:custShowLst>
   <p:notesMasterIdLst>
     <p:notesMasterId r:id="rId19"/>
   </p:notesMasterIdLst>
@@ -545,7 +518,7 @@
           <a:p>
             <a:r>
               <a:rPr lang="en-US" dirty="0"/>
-              <a:t>[Pre-event loop — plays 12:30–1:00 PM as guests return from Walt Brown’s lunch. No emcee needed. Slide auto-advances every 15 seconds.]</a:t>
+              <a:t>[Pre-event loop — plays 12:45–1:10 PM as guests return from Walt Brown’s lunch and take a 10-minute break. No emcee needed. Slide auto-advances every 15 seconds.]</a:t>
             </a:r>
             <a:endParaRPr lang="en-US" dirty="0"/>
           </a:p>
@@ -1612,7 +1585,7 @@
           <a:p>
             <a:r>
               <a:rPr lang="en-US" dirty="0"/>
-              <a:t>[Pre-event loop — no emcee needed. Displays 5 minutes before 1:00 PM to prompt seating.]</a:t>
+              <a:t>[Pre-event loop — no emcee needed. Displays 5 minutes before 1:10 PM to prompt seating.]</a:t>
             </a:r>
             <a:endParaRPr lang="en-US" dirty="0"/>
           </a:p>
@@ -1973,7 +1946,7 @@
           <a:p>
             <a:r>
               <a:rPr lang="en-US" dirty="0"/>
-              <a:t>EMCEE (20 seconds): "Twenty minute break. Sponsor lounge is open — say hi. Back at 2:50 with Beth Fahey."</a:t>
+              <a:t>EMCEE (20 seconds): "Fifteen minute break. Sponsor lounge is open — say hi. Back at 2:55 with Beth Fahey."</a:t>
             </a:r>
             <a:endParaRPr lang="en-US" dirty="0"/>
           </a:p>
@@ -2496,7 +2469,7 @@
                 <a:ea typeface="Calibri" pitchFamily="34" charset="-122"/>
                 <a:cs typeface="Calibri" pitchFamily="34" charset="-120"/>
               </a:rPr>
-              <a:t>Afternoon Program  ·  Resumes at 1:00 PM</a:t>
+              <a:t>Afternoon Program  ·  Resumes at 1:10 PM</a:t>
             </a:r>
             <a:endParaRPr lang="en-US" sz="2200" dirty="0"/>
           </a:p>
@@ -2646,9 +2619,6 @@
       </p:sp>
     </p:spTree>
   </p:cSld>
-  <p:transition spd="med" advTm="15000">
-    <p:fade/>
-  </p:transition>
   <p:clrMapOvr>
     <a:masterClrMapping/>
   </p:clrMapOvr>
@@ -2737,7 +2707,7 @@
                 <a:ea typeface="Calibri" pitchFamily="34" charset="-122"/>
                 <a:cs typeface="Calibri" pitchFamily="34" charset="-120"/>
               </a:rPr>
-              <a:t>SESSION 2  ·  2:50 – 4:25 PM</a:t>
+              <a:t>SESSION 2  ·  2:55 – 4:25 PM</a:t>
             </a:r>
             <a:endParaRPr lang="en-US" sz="1600" dirty="0"/>
           </a:p>
@@ -3108,7 +3078,7 @@
                 <a:ea typeface="Calibri" pitchFamily="34" charset="-122"/>
                 <a:cs typeface="Calibri" pitchFamily="34" charset="-120"/>
               </a:rPr>
-              <a:t>Beth Fahey  ·  2:50 – 4:25 PM</a:t>
+              <a:t>Beth Fahey  ·  2:55 – 4:25 PM</a:t>
             </a:r>
             <a:endParaRPr lang="en-US" sz="1100" dirty="0"/>
           </a:p>
@@ -3663,8 +3633,8 @@
         </p:blipFill>
         <p:spPr>
           <a:xfrm>
-            <a:off x="4435145" y="5039458"/>
-            <a:ext cx="1569720" cy="390964"/>
+            <a:off x="4435145" y="5005368"/>
+            <a:ext cx="1569720" cy="459143"/>
           </a:xfrm>
           <a:prstGeom prst="rect">
             <a:avLst/>
@@ -4338,8 +4308,8 @@
         </p:blipFill>
         <p:spPr>
           <a:xfrm>
-            <a:off x="2021396" y="3566160"/>
-            <a:ext cx="3120619" cy="777240"/>
+            <a:off x="2253089" y="3566160"/>
+            <a:ext cx="2657231" cy="777240"/>
           </a:xfrm>
           <a:prstGeom prst="rect">
             <a:avLst/>
@@ -6714,9 +6684,6 @@
       </p:sp>
     </p:spTree>
   </p:cSld>
-  <p:transition spd="med" advTm="15000">
-    <p:fade/>
-  </p:transition>
   <p:clrMapOvr>
     <a:masterClrMapping/>
   </p:clrMapOvr>
@@ -7169,9 +7136,6 @@
       </p:sp>
     </p:spTree>
   </p:cSld>
-  <p:transition spd="med" advTm="15000">
-    <p:fade/>
-  </p:transition>
   <p:clrMapOvr>
     <a:masterClrMapping/>
   </p:clrMapOvr>
@@ -7424,9 +7388,6 @@
       </p:sp>
     </p:spTree>
   </p:cSld>
-  <p:transition spd="med" advTm="15000">
-    <p:fade/>
-  </p:transition>
   <p:clrMapOvr>
     <a:masterClrMapping/>
   </p:clrMapOvr>
@@ -7529,7 +7490,7 @@
                 <a:ea typeface="Calibri" pitchFamily="34" charset="-122"/>
                 <a:cs typeface="Calibri" pitchFamily="34" charset="-120"/>
               </a:rPr>
-              <a:t>1:00</a:t>
+              <a:t>1:10</a:t>
             </a:r>
             <a:endParaRPr lang="en-US" sz="22000" dirty="0"/>
           </a:p>
@@ -7679,9 +7640,6 @@
       </p:sp>
     </p:spTree>
   </p:cSld>
-  <p:transition spd="med" advTm="15000">
-    <p:fade/>
-  </p:transition>
   <p:clrMapOvr>
     <a:masterClrMapping/>
   </p:clrMapOvr>
@@ -8086,7 +8044,7 @@
                 <a:ea typeface="Calibri" pitchFamily="34" charset="-122"/>
                 <a:cs typeface="Calibri" pitchFamily="34" charset="-120"/>
               </a:rPr>
-              <a:t>SESSION 1  ·  1:00 – 2:30 PM</a:t>
+              <a:t>SESSION 1  ·  1:10 – 2:40 PM</a:t>
             </a:r>
             <a:endParaRPr lang="en-US" sz="1600" dirty="0"/>
           </a:p>
@@ -8457,7 +8415,7 @@
                 <a:ea typeface="Calibri" pitchFamily="34" charset="-122"/>
                 <a:cs typeface="Calibri" pitchFamily="34" charset="-120"/>
               </a:rPr>
-              <a:t>Mark Stanley  ·  1:00 – 2:30 PM</a:t>
+              <a:t>Mark Stanley  ·  1:10 – 2:40 PM</a:t>
             </a:r>
             <a:endParaRPr lang="en-US" sz="1100" dirty="0"/>
           </a:p>
@@ -8847,7 +8805,7 @@
       </p:sp>
       <p:sp>
         <p:nvSpPr>
-          <p:cNvPr id="3" name="CountdownTimer_20"/>
+          <p:cNvPr id="3" name="CountdownTimer_15"/>
           <p:cNvSpPr/>
           <p:nvPr/>
         </p:nvSpPr>
@@ -8878,7 +8836,7 @@
                 <a:ea typeface="Calibri" pitchFamily="34" charset="-122"/>
                 <a:cs typeface="Calibri" pitchFamily="34" charset="-120"/>
               </a:rPr>
-              <a:t>20:00</a:t>
+              <a:t>15:00</a:t>
             </a:r>
             <a:endParaRPr lang="en-US" sz="18000" dirty="0"/>
           </a:p>
@@ -8956,7 +8914,7 @@
                 <a:ea typeface="Calibri" pitchFamily="34" charset="-122"/>
                 <a:cs typeface="Calibri" pitchFamily="34" charset="-120"/>
               </a:rPr>
-              <a:t>We resume at 2:50 PM</a:t>
+              <a:t>We resume at 2:55 PM</a:t>
             </a:r>
             <a:endParaRPr lang="en-US" sz="1800" dirty="0"/>
           </a:p>
@@ -9090,8 +9048,8 @@
         </p:blipFill>
         <p:spPr>
           <a:xfrm>
-            <a:off x="4435145" y="5039458"/>
-            <a:ext cx="1569720" cy="390964"/>
+            <a:off x="4435145" y="5005368"/>
+            <a:ext cx="1569720" cy="459143"/>
           </a:xfrm>
           <a:prstGeom prst="rect">
             <a:avLst/>
